--- a/军民融合/ppt/2.pptx
+++ b/军民融合/ppt/2.pptx
@@ -4348,7 +4348,7 @@
                 <a:ea typeface="微软雅黑" panose="020B0503020204020204" pitchFamily="34" charset="-122"/>
                 <a:cs typeface="+mn-cs"/>
               </a:rPr>
-              <a:t>语义提取</a:t>
+              <a:t>表征提取</a:t>
             </a:r>
             <a:endParaRPr kumimoji="0" lang="zh-CN" altLang="en-US" sz="1230" b="1" i="0" u="none" strike="noStrike" kern="1200" cap="none" spc="0" normalizeH="0" baseline="0" noProof="0" dirty="0">
               <a:ln>
@@ -4701,8 +4701,8 @@
         </p:nvSpPr>
         <p:spPr>
           <a:xfrm>
-            <a:off x="8983345" y="1289685"/>
-            <a:ext cx="871220" cy="469265"/>
+            <a:off x="9110663" y="1289685"/>
+            <a:ext cx="800735" cy="469265"/>
           </a:xfrm>
           <a:prstGeom prst="rect">
             <a:avLst/>
@@ -4792,8 +4792,8 @@
         </p:nvSpPr>
         <p:spPr>
           <a:xfrm>
-            <a:off x="9032875" y="2150110"/>
-            <a:ext cx="871220" cy="469265"/>
+            <a:off x="9110345" y="2151380"/>
+            <a:ext cx="801370" cy="469265"/>
           </a:xfrm>
           <a:prstGeom prst="rect">
             <a:avLst/>
@@ -4915,8 +4915,8 @@
         </p:nvSpPr>
         <p:spPr>
           <a:xfrm>
-            <a:off x="9003665" y="2989580"/>
-            <a:ext cx="871220" cy="469265"/>
+            <a:off x="9110663" y="2989580"/>
+            <a:ext cx="800735" cy="469265"/>
           </a:xfrm>
           <a:prstGeom prst="rect">
             <a:avLst/>
@@ -5381,7 +5381,7 @@
         </p:nvSpPr>
         <p:spPr>
           <a:xfrm rot="5400000" flipH="1" flipV="1">
-            <a:off x="5069840" y="3850640"/>
+            <a:off x="5158423" y="3850640"/>
             <a:ext cx="374650" cy="317500"/>
           </a:xfrm>
           <a:prstGeom prst="notchedRightArrow">
@@ -5616,7 +5616,25 @@
                 <a:cs typeface="Times New Roman" panose="02020603050405020304" pitchFamily="18" charset="0"/>
                 <a:sym typeface="+mn-ea"/>
               </a:rPr>
-              <a:t>基于语义压缩的频谱向量数据库</a:t>
+              <a:t>基于</a:t>
+            </a:r>
+            <a:r>
+              <a:rPr lang="zh-CN" altLang="en-US" sz="1300" b="1" noProof="0" dirty="0">
+                <a:ln>
+                  <a:noFill/>
+                </a:ln>
+                <a:solidFill>
+                  <a:prstClr val="white"/>
+                </a:solidFill>
+                <a:effectLst/>
+                <a:uLnTx/>
+                <a:uFillTx/>
+                <a:latin typeface="微软雅黑" panose="020B0503020204020204" pitchFamily="34" charset="-122"/>
+                <a:ea typeface="微软雅黑" panose="020B0503020204020204" pitchFamily="34" charset="-122"/>
+                <a:cs typeface="Times New Roman" panose="02020603050405020304" pitchFamily="18" charset="0"/>
+                <a:sym typeface="+mn-ea"/>
+              </a:rPr>
+              <a:t>表征压缩的频谱向量数据库</a:t>
             </a:r>
             <a:endParaRPr lang="zh-CN" altLang="en-US" sz="1300" b="1" noProof="0" dirty="0">
               <a:ln>
@@ -6817,7 +6835,7 @@
                 <a:ea typeface="微软雅黑" panose="020B0503020204020204" pitchFamily="34" charset="-122"/>
                 <a:cs typeface="微软雅黑" panose="020B0503020204020204" pitchFamily="34" charset="-122"/>
               </a:rPr>
-              <a:t>物理先验增强的语义</a:t>
+              <a:t>物理先验增强的</a:t>
             </a:r>
             <a:r>
               <a:rPr lang="zh-CN" altLang="en-US" sz="1200" b="1" kern="0" dirty="0">
@@ -6830,7 +6848,7 @@
                 <a:ea typeface="微软雅黑" panose="020B0503020204020204" pitchFamily="34" charset="-122"/>
                 <a:cs typeface="微软雅黑" panose="020B0503020204020204" pitchFamily="34" charset="-122"/>
               </a:rPr>
-              <a:t>压缩提取</a:t>
+              <a:t>表征压缩提取</a:t>
             </a:r>
             <a:endParaRPr lang="zh-CN" altLang="en-US" sz="1200" b="1" kern="0" dirty="0">
               <a:solidFill>
@@ -6984,7 +7002,20 @@
                 <a:ea typeface="微软雅黑" panose="020B0503020204020204" pitchFamily="34" charset="-122"/>
                 <a:cs typeface="微软雅黑" panose="020B0503020204020204" pitchFamily="34" charset="-122"/>
               </a:rPr>
-              <a:t>高频语义向量的无缓冲并发</a:t>
+              <a:t>高频</a:t>
+            </a:r>
+            <a:r>
+              <a:rPr lang="zh-CN" altLang="en-US" sz="1200" b="1" kern="0" dirty="0">
+                <a:solidFill>
+                  <a:schemeClr val="tx1"/>
+                </a:solidFill>
+                <a:effectLst/>
+                <a:uFillTx/>
+                <a:latin typeface="微软雅黑" panose="020B0503020204020204" pitchFamily="34" charset="-122"/>
+                <a:ea typeface="微软雅黑" panose="020B0503020204020204" pitchFamily="34" charset="-122"/>
+                <a:cs typeface="微软雅黑" panose="020B0503020204020204" pitchFamily="34" charset="-122"/>
+              </a:rPr>
+              <a:t>表征向量的无缓冲并发</a:t>
             </a:r>
             <a:r>
               <a:rPr lang="zh-CN" altLang="en-US" sz="1200" b="1" kern="0" dirty="0">

--- a/军民融合/ppt/2.pptx
+++ b/军民融合/ppt/2.pptx
@@ -6632,19 +6632,6 @@
               </a:spcAft>
             </a:pPr>
             <a:r>
-              <a:rPr lang="en-US" altLang="zh-CN" sz="1200" b="1" kern="0" dirty="0">
-                <a:solidFill>
-                  <a:schemeClr val="tx1"/>
-                </a:solidFill>
-                <a:effectLst/>
-                <a:uFillTx/>
-                <a:latin typeface="微软雅黑" panose="020B0503020204020204" pitchFamily="34" charset="-122"/>
-                <a:ea typeface="微软雅黑" panose="020B0503020204020204" pitchFamily="34" charset="-122"/>
-                <a:cs typeface="微软雅黑" panose="020B0503020204020204" pitchFamily="34" charset="-122"/>
-              </a:rPr>
-              <a:t>PU</a:t>
-            </a:r>
-            <a:r>
               <a:rPr lang="zh-CN" altLang="en-US" sz="1200" b="1" kern="0" dirty="0">
                 <a:solidFill>
                   <a:schemeClr val="tx1"/>
@@ -6655,7 +6642,7 @@
                 <a:ea typeface="微软雅黑" panose="020B0503020204020204" pitchFamily="34" charset="-122"/>
                 <a:cs typeface="微软雅黑" panose="020B0503020204020204" pitchFamily="34" charset="-122"/>
               </a:rPr>
-              <a:t>风险估计的可疑事件</a:t>
+              <a:t>基于风险估计的可疑事件</a:t>
             </a:r>
             <a:r>
               <a:rPr lang="zh-CN" altLang="en-US" sz="1200" b="1" kern="0" dirty="0">

--- a/军民融合/ppt/2.pptx
+++ b/军民融合/ppt/2.pptx
@@ -4109,7 +4109,24 @@
                 <a:ea typeface="微软雅黑" panose="020B0503020204020204" pitchFamily="34" charset="-122"/>
                 <a:cs typeface="+mn-cs"/>
               </a:rPr>
-              <a:t>可疑事件识别</a:t>
+              <a:t>目标</a:t>
+            </a:r>
+            <a:r>
+              <a:rPr kumimoji="0" lang="zh-CN" altLang="en-US" sz="1230" b="1" i="0" u="none" strike="noStrike" kern="1200" cap="none" spc="0" normalizeH="0" baseline="0" noProof="0" dirty="0">
+                <a:ln>
+                  <a:noFill/>
+                </a:ln>
+                <a:solidFill>
+                  <a:prstClr val="black"/>
+                </a:solidFill>
+                <a:effectLst/>
+                <a:uLnTx/>
+                <a:uFillTx/>
+                <a:latin typeface="微软雅黑" panose="020B0503020204020204" pitchFamily="34" charset="-122"/>
+                <a:ea typeface="微软雅黑" panose="020B0503020204020204" pitchFamily="34" charset="-122"/>
+                <a:cs typeface="+mn-cs"/>
+              </a:rPr>
+              <a:t>识别</a:t>
             </a:r>
             <a:endParaRPr kumimoji="0" lang="zh-CN" altLang="en-US" sz="1230" b="1" i="0" u="none" strike="noStrike" kern="1200" cap="none" spc="0" normalizeH="0" baseline="0" noProof="0" dirty="0">
               <a:ln>
@@ -4126,31 +4143,6 @@
               <a:cs typeface="+mn-cs"/>
             </a:endParaRPr>
           </a:p>
-        </p:txBody>
-      </p:sp>
-      <p:sp>
-        <p:nvSpPr>
-          <p:cNvPr id="87" name="文本框 86"/>
-          <p:cNvSpPr txBox="1"/>
-          <p:nvPr/>
-        </p:nvSpPr>
-        <p:spPr>
-          <a:xfrm>
-            <a:off x="1736090" y="2989580"/>
-            <a:ext cx="874395" cy="469265"/>
-          </a:xfrm>
-          <a:prstGeom prst="rect">
-            <a:avLst/>
-          </a:prstGeom>
-          <a:solidFill>
-            <a:schemeClr val="bg1"/>
-          </a:solidFill>
-        </p:spPr>
-        <p:txBody>
-          <a:bodyPr wrap="square" rtlCol="0">
-            <a:spAutoFit/>
-          </a:bodyPr>
-          <a:lstStyle/>
           <a:p>
             <a:pPr marL="0" marR="0" lvl="0" indent="0" algn="ctr" defTabSz="914400" rtl="0" eaLnBrk="1" fontAlgn="auto" latinLnBrk="0" hangingPunct="1">
               <a:lnSpc>
@@ -4183,8 +4175,65 @@
                 <a:ea typeface="微软雅黑" panose="020B0503020204020204" pitchFamily="34" charset="-122"/>
                 <a:cs typeface="+mn-cs"/>
               </a:rPr>
-              <a:t>存储</a:t>
-            </a:r>
+              <a:t>价值</a:t>
+            </a:r>
+            <a:endParaRPr kumimoji="0" lang="zh-CN" altLang="en-US" sz="1230" b="1" i="0" u="none" strike="noStrike" kern="1200" cap="none" spc="0" normalizeH="0" baseline="0" noProof="0" dirty="0">
+              <a:ln>
+                <a:noFill/>
+              </a:ln>
+              <a:solidFill>
+                <a:prstClr val="black"/>
+              </a:solidFill>
+              <a:effectLst/>
+              <a:uLnTx/>
+              <a:uFillTx/>
+              <a:latin typeface="微软雅黑" panose="020B0503020204020204" pitchFamily="34" charset="-122"/>
+              <a:ea typeface="微软雅黑" panose="020B0503020204020204" pitchFamily="34" charset="-122"/>
+              <a:cs typeface="+mn-cs"/>
+            </a:endParaRPr>
+          </a:p>
+        </p:txBody>
+      </p:sp>
+      <p:sp>
+        <p:nvSpPr>
+          <p:cNvPr id="87" name="文本框 86"/>
+          <p:cNvSpPr txBox="1"/>
+          <p:nvPr/>
+        </p:nvSpPr>
+        <p:spPr>
+          <a:xfrm>
+            <a:off x="1736090" y="2989580"/>
+            <a:ext cx="874395" cy="469265"/>
+          </a:xfrm>
+          <a:prstGeom prst="rect">
+            <a:avLst/>
+          </a:prstGeom>
+          <a:solidFill>
+            <a:schemeClr val="bg1"/>
+          </a:solidFill>
+        </p:spPr>
+        <p:txBody>
+          <a:bodyPr wrap="square" rtlCol="0">
+            <a:spAutoFit/>
+          </a:bodyPr>
+          <a:lstStyle/>
+          <a:p>
+            <a:pPr marL="0" marR="0" lvl="0" indent="0" algn="ctr" defTabSz="914400" rtl="0" eaLnBrk="1" fontAlgn="auto" latinLnBrk="0" hangingPunct="1">
+              <a:lnSpc>
+                <a:spcPct val="100000"/>
+              </a:lnSpc>
+              <a:spcBef>
+                <a:spcPts val="0"/>
+              </a:spcBef>
+              <a:spcAft>
+                <a:spcPts val="0"/>
+              </a:spcAft>
+              <a:buClrTx/>
+              <a:buSzTx/>
+              <a:buFontTx/>
+              <a:buNone/>
+              <a:defRPr/>
+            </a:pPr>
             <a:r>
               <a:rPr kumimoji="0" lang="zh-CN" altLang="en-US" sz="1230" b="1" i="0" u="none" strike="noStrike" kern="1200" cap="none" spc="0" normalizeH="0" baseline="0" noProof="0" dirty="0">
                 <a:ln>
@@ -4200,7 +4249,24 @@
                 <a:ea typeface="微软雅黑" panose="020B0503020204020204" pitchFamily="34" charset="-122"/>
                 <a:cs typeface="+mn-cs"/>
               </a:rPr>
-              <a:t>事件判别</a:t>
+              <a:t>存储利用</a:t>
+            </a:r>
+            <a:r>
+              <a:rPr kumimoji="0" lang="zh-CN" altLang="en-US" sz="1230" b="1" i="0" u="none" strike="noStrike" kern="1200" cap="none" spc="0" normalizeH="0" baseline="0" noProof="0" dirty="0">
+                <a:ln>
+                  <a:noFill/>
+                </a:ln>
+                <a:solidFill>
+                  <a:prstClr val="black"/>
+                </a:solidFill>
+                <a:effectLst/>
+                <a:uLnTx/>
+                <a:uFillTx/>
+                <a:latin typeface="微软雅黑" panose="020B0503020204020204" pitchFamily="34" charset="-122"/>
+                <a:ea typeface="微软雅黑" panose="020B0503020204020204" pitchFamily="34" charset="-122"/>
+                <a:cs typeface="+mn-cs"/>
+              </a:rPr>
+              <a:t>价值</a:t>
             </a:r>
             <a:endParaRPr kumimoji="0" lang="zh-CN" altLang="en-US" sz="1230" b="1" i="0" u="none" strike="noStrike" kern="1200" cap="none" spc="0" normalizeH="0" baseline="0" noProof="0" dirty="0">
               <a:ln>
@@ -6176,13 +6242,85 @@
       </p:sp>
       <p:sp>
         <p:nvSpPr>
-          <p:cNvPr id="121" name="箭头: 左右 94"/>
+          <p:cNvPr id="122" name="文本框 121"/>
+          <p:cNvSpPr txBox="1"/>
+          <p:nvPr/>
+        </p:nvSpPr>
+        <p:spPr>
+          <a:xfrm>
+            <a:off x="3423324" y="5349855"/>
+            <a:ext cx="576217" cy="280035"/>
+          </a:xfrm>
+          <a:prstGeom prst="rect">
+            <a:avLst/>
+          </a:prstGeom>
+          <a:noFill/>
+        </p:spPr>
+        <p:txBody>
+          <a:bodyPr wrap="square" rtlCol="0">
+            <a:spAutoFit/>
+          </a:bodyPr>
+          <a:lstStyle/>
+          <a:p>
+            <a:pPr marL="0" marR="0" lvl="0" indent="0" algn="ctr" defTabSz="914400" rtl="0" eaLnBrk="1" fontAlgn="auto" latinLnBrk="0" hangingPunct="1">
+              <a:lnSpc>
+                <a:spcPct val="100000"/>
+              </a:lnSpc>
+              <a:spcBef>
+                <a:spcPts val="0"/>
+              </a:spcBef>
+              <a:spcAft>
+                <a:spcPts val="0"/>
+              </a:spcAft>
+              <a:buClrTx/>
+              <a:buSzTx/>
+              <a:buFontTx/>
+              <a:buNone/>
+              <a:defRPr/>
+            </a:pPr>
+            <a:r>
+              <a:rPr kumimoji="0" lang="zh-CN" altLang="en-US" sz="1230" b="1" i="0" u="none" strike="noStrike" kern="1200" cap="none" spc="0" normalizeH="0" baseline="0" noProof="0" dirty="0">
+                <a:ln>
+                  <a:noFill/>
+                </a:ln>
+                <a:solidFill>
+                  <a:prstClr val="black"/>
+                </a:solidFill>
+                <a:effectLst/>
+                <a:uLnTx/>
+                <a:uFillTx/>
+                <a:latin typeface="微软雅黑" panose="020B0503020204020204" pitchFamily="34" charset="-122"/>
+                <a:ea typeface="微软雅黑" panose="020B0503020204020204" pitchFamily="34" charset="-122"/>
+                <a:cs typeface="+mn-cs"/>
+              </a:rPr>
+              <a:t>支撑</a:t>
+            </a:r>
+            <a:endParaRPr kumimoji="0" lang="zh-CN" altLang="en-US" sz="1230" b="1" i="0" u="none" strike="noStrike" kern="1200" cap="none" spc="0" normalizeH="0" baseline="0" noProof="0" dirty="0">
+              <a:ln>
+                <a:noFill/>
+              </a:ln>
+              <a:solidFill>
+                <a:prstClr val="black"/>
+              </a:solidFill>
+              <a:effectLst/>
+              <a:uLnTx/>
+              <a:uFillTx/>
+              <a:latin typeface="微软雅黑" panose="020B0503020204020204" pitchFamily="34" charset="-122"/>
+              <a:ea typeface="微软雅黑" panose="020B0503020204020204" pitchFamily="34" charset="-122"/>
+              <a:cs typeface="+mn-cs"/>
+            </a:endParaRPr>
+          </a:p>
+        </p:txBody>
+      </p:sp>
+      <p:sp>
+        <p:nvSpPr>
+          <p:cNvPr id="124" name="箭头: 左右 94"/>
           <p:cNvSpPr/>
           <p:nvPr/>
         </p:nvSpPr>
         <p:spPr>
           <a:xfrm>
-            <a:off x="3504302" y="5647332"/>
+            <a:off x="6746612" y="5647241"/>
             <a:ext cx="432000" cy="252000"/>
           </a:xfrm>
           <a:prstGeom prst="leftRightArrow">
@@ -6262,164 +6400,6 @@
       </p:sp>
       <p:sp>
         <p:nvSpPr>
-          <p:cNvPr id="122" name="文本框 121"/>
-          <p:cNvSpPr txBox="1"/>
-          <p:nvPr/>
-        </p:nvSpPr>
-        <p:spPr>
-          <a:xfrm>
-            <a:off x="3423324" y="5349855"/>
-            <a:ext cx="576217" cy="280035"/>
-          </a:xfrm>
-          <a:prstGeom prst="rect">
-            <a:avLst/>
-          </a:prstGeom>
-          <a:noFill/>
-        </p:spPr>
-        <p:txBody>
-          <a:bodyPr wrap="square" rtlCol="0">
-            <a:spAutoFit/>
-          </a:bodyPr>
-          <a:lstStyle/>
-          <a:p>
-            <a:pPr marL="0" marR="0" lvl="0" indent="0" algn="ctr" defTabSz="914400" rtl="0" eaLnBrk="1" fontAlgn="auto" latinLnBrk="0" hangingPunct="1">
-              <a:lnSpc>
-                <a:spcPct val="100000"/>
-              </a:lnSpc>
-              <a:spcBef>
-                <a:spcPts val="0"/>
-              </a:spcBef>
-              <a:spcAft>
-                <a:spcPts val="0"/>
-              </a:spcAft>
-              <a:buClrTx/>
-              <a:buSzTx/>
-              <a:buFontTx/>
-              <a:buNone/>
-              <a:defRPr/>
-            </a:pPr>
-            <a:r>
-              <a:rPr kumimoji="0" lang="zh-CN" altLang="en-US" sz="1230" b="1" i="0" u="none" strike="noStrike" kern="1200" cap="none" spc="0" normalizeH="0" baseline="0" noProof="0" dirty="0">
-                <a:ln>
-                  <a:noFill/>
-                </a:ln>
-                <a:solidFill>
-                  <a:prstClr val="black"/>
-                </a:solidFill>
-                <a:effectLst/>
-                <a:uLnTx/>
-                <a:uFillTx/>
-                <a:latin typeface="微软雅黑" panose="020B0503020204020204" pitchFamily="34" charset="-122"/>
-                <a:ea typeface="微软雅黑" panose="020B0503020204020204" pitchFamily="34" charset="-122"/>
-                <a:cs typeface="+mn-cs"/>
-              </a:rPr>
-              <a:t>协同</a:t>
-            </a:r>
-            <a:endParaRPr kumimoji="0" lang="zh-CN" altLang="en-US" sz="1230" b="1" i="0" u="none" strike="noStrike" kern="1200" cap="none" spc="0" normalizeH="0" baseline="0" noProof="0" dirty="0">
-              <a:ln>
-                <a:noFill/>
-              </a:ln>
-              <a:solidFill>
-                <a:prstClr val="black"/>
-              </a:solidFill>
-              <a:effectLst/>
-              <a:uLnTx/>
-              <a:uFillTx/>
-              <a:latin typeface="微软雅黑" panose="020B0503020204020204" pitchFamily="34" charset="-122"/>
-              <a:ea typeface="微软雅黑" panose="020B0503020204020204" pitchFamily="34" charset="-122"/>
-              <a:cs typeface="+mn-cs"/>
-            </a:endParaRPr>
-          </a:p>
-        </p:txBody>
-      </p:sp>
-      <p:sp>
-        <p:nvSpPr>
-          <p:cNvPr id="124" name="箭头: 左右 94"/>
-          <p:cNvSpPr/>
-          <p:nvPr/>
-        </p:nvSpPr>
-        <p:spPr>
-          <a:xfrm>
-            <a:off x="6746612" y="5647332"/>
-            <a:ext cx="432000" cy="252000"/>
-          </a:xfrm>
-          <a:prstGeom prst="leftRightArrow">
-            <a:avLst>
-              <a:gd name="adj1" fmla="val 42624"/>
-              <a:gd name="adj2" fmla="val 50000"/>
-            </a:avLst>
-          </a:prstGeom>
-          <a:solidFill>
-            <a:srgbClr val="C00000"/>
-          </a:solidFill>
-          <a:ln w="19050">
-            <a:noFill/>
-          </a:ln>
-          <a:extLst>
-            <a:ext uri="{909E8E84-426E-40DD-AFC4-6F175D3DCCD1}">
-              <a14:hiddenFill xmlns:a14="http://schemas.microsoft.com/office/drawing/2010/main">
-                <a:solidFill>
-                  <a:schemeClr val="accent1"/>
-                </a:solidFill>
-              </a14:hiddenFill>
-            </a:ext>
-          </a:extLst>
-        </p:spPr>
-        <p:style>
-          <a:lnRef idx="2">
-            <a:schemeClr val="accent1">
-              <a:shade val="50000"/>
-            </a:schemeClr>
-          </a:lnRef>
-          <a:fillRef idx="1">
-            <a:schemeClr val="accent1"/>
-          </a:fillRef>
-          <a:effectRef idx="0">
-            <a:schemeClr val="accent1"/>
-          </a:effectRef>
-          <a:fontRef idx="minor">
-            <a:schemeClr val="lt1"/>
-          </a:fontRef>
-        </p:style>
-        <p:txBody>
-          <a:bodyPr rtlCol="0" anchor="ctr"/>
-          <a:lstStyle/>
-          <a:p>
-            <a:pPr marL="0" marR="0" lvl="0" indent="0" algn="ctr" defTabSz="914400" rtl="0" eaLnBrk="1" fontAlgn="auto" latinLnBrk="0" hangingPunct="1">
-              <a:lnSpc>
-                <a:spcPct val="100000"/>
-              </a:lnSpc>
-              <a:spcBef>
-                <a:spcPts val="0"/>
-              </a:spcBef>
-              <a:spcAft>
-                <a:spcPts val="0"/>
-              </a:spcAft>
-              <a:buClrTx/>
-              <a:buSzTx/>
-              <a:buFontTx/>
-              <a:buNone/>
-              <a:defRPr/>
-            </a:pPr>
-            <a:endParaRPr kumimoji="0" lang="zh-CN" altLang="en-US" sz="1580" b="0" i="0" u="none" strike="noStrike" kern="1200" cap="none" spc="0" normalizeH="0" baseline="0" noProof="0" dirty="0">
-              <a:ln>
-                <a:noFill/>
-              </a:ln>
-              <a:solidFill>
-                <a:prstClr val="white"/>
-              </a:solidFill>
-              <a:effectLst/>
-              <a:uLnTx/>
-              <a:uFillTx/>
-              <a:latin typeface="等线" panose="02010600030101010101" charset="-122"/>
-              <a:ea typeface="等线" panose="02010600030101010101" charset="-122"/>
-              <a:cs typeface="+mn-cs"/>
-            </a:endParaRPr>
-          </a:p>
-        </p:txBody>
-      </p:sp>
-      <p:sp>
-        <p:nvSpPr>
           <p:cNvPr id="125" name="文本框 124"/>
           <p:cNvSpPr txBox="1"/>
           <p:nvPr/>
@@ -6552,7 +6532,7 @@
                 <a:ea typeface="微软雅黑" panose="020B0503020204020204" pitchFamily="34" charset="-122"/>
                 <a:cs typeface="微软雅黑" panose="020B0503020204020204" pitchFamily="34" charset="-122"/>
               </a:rPr>
-              <a:t>流式变点检测的事件窗口</a:t>
+              <a:t>事件窗口</a:t>
             </a:r>
             <a:r>
               <a:rPr lang="zh-CN" altLang="en-US" sz="1200" b="1" kern="0" dirty="0">
@@ -6642,7 +6622,7 @@
                 <a:ea typeface="微软雅黑" panose="020B0503020204020204" pitchFamily="34" charset="-122"/>
                 <a:cs typeface="微软雅黑" panose="020B0503020204020204" pitchFamily="34" charset="-122"/>
               </a:rPr>
-              <a:t>基于风险估计的可疑事件</a:t>
+              <a:t>价值评估</a:t>
             </a:r>
             <a:r>
               <a:rPr lang="zh-CN" altLang="en-US" sz="1200" b="1" kern="0" dirty="0">
@@ -6655,7 +6635,7 @@
                 <a:ea typeface="微软雅黑" panose="020B0503020204020204" pitchFamily="34" charset="-122"/>
                 <a:cs typeface="微软雅黑" panose="020B0503020204020204" pitchFamily="34" charset="-122"/>
               </a:rPr>
-              <a:t>识别</a:t>
+              <a:t>建模</a:t>
             </a:r>
             <a:endParaRPr lang="zh-CN" altLang="en-US" sz="1200" b="1" kern="0" dirty="0">
               <a:solidFill>
@@ -6732,20 +6712,7 @@
                 <a:ea typeface="微软雅黑" panose="020B0503020204020204" pitchFamily="34" charset="-122"/>
                 <a:cs typeface="微软雅黑" panose="020B0503020204020204" pitchFamily="34" charset="-122"/>
               </a:rPr>
-              <a:t>子模覆盖增益的事件入库</a:t>
-            </a:r>
-            <a:r>
-              <a:rPr lang="zh-CN" altLang="en-US" sz="1200" b="1" kern="0" dirty="0">
-                <a:solidFill>
-                  <a:schemeClr val="tx1"/>
-                </a:solidFill>
-                <a:effectLst/>
-                <a:uFillTx/>
-                <a:latin typeface="微软雅黑" panose="020B0503020204020204" pitchFamily="34" charset="-122"/>
-                <a:ea typeface="微软雅黑" panose="020B0503020204020204" pitchFamily="34" charset="-122"/>
-                <a:cs typeface="微软雅黑" panose="020B0503020204020204" pitchFamily="34" charset="-122"/>
-              </a:rPr>
-              <a:t>判别</a:t>
+              <a:t>约束优化求解</a:t>
             </a:r>
             <a:endParaRPr lang="zh-CN" altLang="en-US" sz="1200" b="1" kern="0" dirty="0">
               <a:solidFill>
@@ -6822,19 +6789,6 @@
                 <a:ea typeface="微软雅黑" panose="020B0503020204020204" pitchFamily="34" charset="-122"/>
                 <a:cs typeface="微软雅黑" panose="020B0503020204020204" pitchFamily="34" charset="-122"/>
               </a:rPr>
-              <a:t>物理先验增强的</a:t>
-            </a:r>
-            <a:r>
-              <a:rPr lang="zh-CN" altLang="en-US" sz="1200" b="1" kern="0" dirty="0">
-                <a:solidFill>
-                  <a:schemeClr val="tx1"/>
-                </a:solidFill>
-                <a:effectLst/>
-                <a:uFillTx/>
-                <a:latin typeface="微软雅黑" panose="020B0503020204020204" pitchFamily="34" charset="-122"/>
-                <a:ea typeface="微软雅黑" panose="020B0503020204020204" pitchFamily="34" charset="-122"/>
-                <a:cs typeface="微软雅黑" panose="020B0503020204020204" pitchFamily="34" charset="-122"/>
-              </a:rPr>
               <a:t>表征压缩提取</a:t>
             </a:r>
             <a:endParaRPr lang="zh-CN" altLang="en-US" sz="1200" b="1" kern="0" dirty="0">
@@ -6912,7 +6866,7 @@
                 <a:ea typeface="微软雅黑" panose="020B0503020204020204" pitchFamily="34" charset="-122"/>
                 <a:cs typeface="微软雅黑" panose="020B0503020204020204" pitchFamily="34" charset="-122"/>
               </a:rPr>
-              <a:t>异构介质的高局部性磁盘索引</a:t>
+              <a:t>磁盘索引</a:t>
             </a:r>
             <a:endParaRPr lang="zh-CN" altLang="en-US" sz="1200" b="1" kern="0" dirty="0">
               <a:solidFill>
@@ -6989,20 +6943,7 @@
                 <a:ea typeface="微软雅黑" panose="020B0503020204020204" pitchFamily="34" charset="-122"/>
                 <a:cs typeface="微软雅黑" panose="020B0503020204020204" pitchFamily="34" charset="-122"/>
               </a:rPr>
-              <a:t>高频</a:t>
-            </a:r>
-            <a:r>
-              <a:rPr lang="zh-CN" altLang="en-US" sz="1200" b="1" kern="0" dirty="0">
-                <a:solidFill>
-                  <a:schemeClr val="tx1"/>
-                </a:solidFill>
-                <a:effectLst/>
-                <a:uFillTx/>
-                <a:latin typeface="微软雅黑" panose="020B0503020204020204" pitchFamily="34" charset="-122"/>
-                <a:ea typeface="微软雅黑" panose="020B0503020204020204" pitchFamily="34" charset="-122"/>
-                <a:cs typeface="微软雅黑" panose="020B0503020204020204" pitchFamily="34" charset="-122"/>
-              </a:rPr>
-              <a:t>表征向量的无缓冲并发</a:t>
+              <a:t>向量并发</a:t>
             </a:r>
             <a:r>
               <a:rPr lang="zh-CN" altLang="en-US" sz="1200" b="1" kern="0" dirty="0">
@@ -7092,20 +7033,7 @@
                 <a:ea typeface="微软雅黑" panose="020B0503020204020204" pitchFamily="34" charset="-122"/>
                 <a:cs typeface="微软雅黑" panose="020B0503020204020204" pitchFamily="34" charset="-122"/>
               </a:rPr>
-              <a:t>事件驱动的分层存证与动态</a:t>
-            </a:r>
-            <a:r>
-              <a:rPr lang="zh-CN" altLang="en-US" sz="1200" b="1" kern="0" dirty="0">
-                <a:solidFill>
-                  <a:schemeClr val="tx1"/>
-                </a:solidFill>
-                <a:effectLst/>
-                <a:uFillTx/>
-                <a:latin typeface="微软雅黑" panose="020B0503020204020204" pitchFamily="34" charset="-122"/>
-                <a:ea typeface="微软雅黑" panose="020B0503020204020204" pitchFamily="34" charset="-122"/>
-                <a:cs typeface="微软雅黑" panose="020B0503020204020204" pitchFamily="34" charset="-122"/>
-              </a:rPr>
-              <a:t>摘要</a:t>
+              <a:t>分层存证</a:t>
             </a:r>
             <a:endParaRPr lang="zh-CN" altLang="en-US" sz="1200" b="1" kern="0" dirty="0">
               <a:solidFill>
@@ -7182,20 +7110,7 @@
                 <a:ea typeface="微软雅黑" panose="020B0503020204020204" pitchFamily="34" charset="-122"/>
                 <a:cs typeface="微软雅黑" panose="020B0503020204020204" pitchFamily="34" charset="-122"/>
               </a:rPr>
-              <a:t>结合特征的可验证分级索引</a:t>
-            </a:r>
-            <a:r>
-              <a:rPr lang="zh-CN" altLang="en-US" sz="1200" b="1" kern="0" dirty="0">
-                <a:solidFill>
-                  <a:schemeClr val="tx1"/>
-                </a:solidFill>
-                <a:effectLst/>
-                <a:uFillTx/>
-                <a:latin typeface="微软雅黑" panose="020B0503020204020204" pitchFamily="34" charset="-122"/>
-                <a:ea typeface="微软雅黑" panose="020B0503020204020204" pitchFamily="34" charset="-122"/>
-                <a:cs typeface="微软雅黑" panose="020B0503020204020204" pitchFamily="34" charset="-122"/>
-              </a:rPr>
-              <a:t>构建</a:t>
+              <a:t>分级索引</a:t>
             </a:r>
             <a:endParaRPr lang="zh-CN" altLang="en-US" sz="1200" b="1" kern="0" dirty="0">
               <a:solidFill>
@@ -7272,19 +7187,6 @@
                 <a:ea typeface="微软雅黑" panose="020B0503020204020204" pitchFamily="34" charset="-122"/>
                 <a:cs typeface="微软雅黑" panose="020B0503020204020204" pitchFamily="34" charset="-122"/>
               </a:rPr>
-              <a:t>高效可验证查询与</a:t>
-            </a:r>
-            <a:r>
-              <a:rPr lang="zh-CN" altLang="en-US" sz="1200" b="1" kern="0" dirty="0">
-                <a:solidFill>
-                  <a:schemeClr val="tx1"/>
-                </a:solidFill>
-                <a:effectLst/>
-                <a:uFillTx/>
-                <a:latin typeface="微软雅黑" panose="020B0503020204020204" pitchFamily="34" charset="-122"/>
-                <a:ea typeface="微软雅黑" panose="020B0503020204020204" pitchFamily="34" charset="-122"/>
-                <a:cs typeface="微软雅黑" panose="020B0503020204020204" pitchFamily="34" charset="-122"/>
-              </a:rPr>
               <a:t>协同更新</a:t>
             </a:r>
             <a:endParaRPr lang="zh-CN" altLang="en-US" sz="1200" b="1" kern="0" dirty="0">
@@ -7572,6 +7474,56 @@
           </a:prstGeom>
         </p:spPr>
       </p:pic>
+      <p:sp>
+        <p:nvSpPr>
+          <p:cNvPr id="2" name="右箭头 1"/>
+          <p:cNvSpPr/>
+          <p:nvPr/>
+        </p:nvSpPr>
+        <p:spPr>
+          <a:xfrm>
+            <a:off x="3520440" y="5647146"/>
+            <a:ext cx="396000" cy="252095"/>
+          </a:xfrm>
+          <a:prstGeom prst="rightArrow">
+            <a:avLst>
+              <a:gd name="adj1" fmla="val 41561"/>
+              <a:gd name="adj2" fmla="val 50000"/>
+            </a:avLst>
+          </a:prstGeom>
+          <a:solidFill>
+            <a:srgbClr val="C00000"/>
+          </a:solidFill>
+          <a:ln w="19050">
+            <a:solidFill>
+              <a:srgbClr val="C00000"/>
+            </a:solidFill>
+          </a:ln>
+        </p:spPr>
+        <p:style>
+          <a:lnRef idx="2">
+            <a:schemeClr val="accent1">
+              <a:lumMod val="75000"/>
+            </a:schemeClr>
+          </a:lnRef>
+          <a:fillRef idx="1">
+            <a:schemeClr val="accent1"/>
+          </a:fillRef>
+          <a:effectRef idx="0">
+            <a:srgbClr val="FFFFFF"/>
+          </a:effectRef>
+          <a:fontRef idx="minor">
+            <a:schemeClr val="lt1"/>
+          </a:fontRef>
+        </p:style>
+        <p:txBody>
+          <a:bodyPr rtlCol="0" anchor="ctr"/>
+          <a:p>
+            <a:pPr algn="ctr"/>
+            <a:endParaRPr lang="zh-CN" altLang="en-US"/>
+          </a:p>
+        </p:txBody>
+      </p:sp>
     </p:spTree>
   </p:cSld>
   <p:clrMapOvr>

--- a/军民融合/ppt/2.pptx
+++ b/军民融合/ppt/2.pptx
@@ -3758,7 +3758,7 @@
                 <a:ea typeface="微软雅黑" panose="020B0503020204020204" pitchFamily="34" charset="-122"/>
                 <a:cs typeface="微软雅黑" panose="020B0503020204020204" pitchFamily="34" charset="-122"/>
               </a:rPr>
-              <a:t>提取</a:t>
+              <a:t>筛选</a:t>
             </a:r>
             <a:endParaRPr lang="zh-CN" altLang="en-US" sz="1400" b="1" dirty="0">
               <a:latin typeface="微软雅黑" panose="020B0503020204020204" pitchFamily="34" charset="-122"/>
@@ -4109,7 +4109,7 @@
                 <a:ea typeface="微软雅黑" panose="020B0503020204020204" pitchFamily="34" charset="-122"/>
                 <a:cs typeface="+mn-cs"/>
               </a:rPr>
-              <a:t>目标</a:t>
+              <a:t>识别价值</a:t>
             </a:r>
             <a:r>
               <a:rPr kumimoji="0" lang="zh-CN" altLang="en-US" sz="1230" b="1" i="0" u="none" strike="noStrike" kern="1200" cap="none" spc="0" normalizeH="0" baseline="0" noProof="0" dirty="0">
@@ -4126,7 +4126,7 @@
                 <a:ea typeface="微软雅黑" panose="020B0503020204020204" pitchFamily="34" charset="-122"/>
                 <a:cs typeface="+mn-cs"/>
               </a:rPr>
-              <a:t>识别</a:t>
+              <a:t>评估</a:t>
             </a:r>
             <a:endParaRPr kumimoji="0" lang="zh-CN" altLang="en-US" sz="1230" b="1" i="0" u="none" strike="noStrike" kern="1200" cap="none" spc="0" normalizeH="0" baseline="0" noProof="0" dirty="0">
               <a:ln>
@@ -4143,6 +4143,31 @@
               <a:cs typeface="+mn-cs"/>
             </a:endParaRPr>
           </a:p>
+        </p:txBody>
+      </p:sp>
+      <p:sp>
+        <p:nvSpPr>
+          <p:cNvPr id="87" name="文本框 86"/>
+          <p:cNvSpPr txBox="1"/>
+          <p:nvPr/>
+        </p:nvSpPr>
+        <p:spPr>
+          <a:xfrm>
+            <a:off x="1736090" y="2989580"/>
+            <a:ext cx="874395" cy="469265"/>
+          </a:xfrm>
+          <a:prstGeom prst="rect">
+            <a:avLst/>
+          </a:prstGeom>
+          <a:solidFill>
+            <a:schemeClr val="bg1"/>
+          </a:solidFill>
+        </p:spPr>
+        <p:txBody>
+          <a:bodyPr wrap="square" rtlCol="0">
+            <a:spAutoFit/>
+          </a:bodyPr>
+          <a:lstStyle/>
           <a:p>
             <a:pPr marL="0" marR="0" lvl="0" indent="0" algn="ctr" defTabSz="914400" rtl="0" eaLnBrk="1" fontAlgn="auto" latinLnBrk="0" hangingPunct="1">
               <a:lnSpc>
@@ -4175,65 +4200,8 @@
                 <a:ea typeface="微软雅黑" panose="020B0503020204020204" pitchFamily="34" charset="-122"/>
                 <a:cs typeface="+mn-cs"/>
               </a:rPr>
-              <a:t>价值</a:t>
-            </a:r>
-            <a:endParaRPr kumimoji="0" lang="zh-CN" altLang="en-US" sz="1230" b="1" i="0" u="none" strike="noStrike" kern="1200" cap="none" spc="0" normalizeH="0" baseline="0" noProof="0" dirty="0">
-              <a:ln>
-                <a:noFill/>
-              </a:ln>
-              <a:solidFill>
-                <a:prstClr val="black"/>
-              </a:solidFill>
-              <a:effectLst/>
-              <a:uLnTx/>
-              <a:uFillTx/>
-              <a:latin typeface="微软雅黑" panose="020B0503020204020204" pitchFamily="34" charset="-122"/>
-              <a:ea typeface="微软雅黑" panose="020B0503020204020204" pitchFamily="34" charset="-122"/>
-              <a:cs typeface="+mn-cs"/>
-            </a:endParaRPr>
-          </a:p>
-        </p:txBody>
-      </p:sp>
-      <p:sp>
-        <p:nvSpPr>
-          <p:cNvPr id="87" name="文本框 86"/>
-          <p:cNvSpPr txBox="1"/>
-          <p:nvPr/>
-        </p:nvSpPr>
-        <p:spPr>
-          <a:xfrm>
-            <a:off x="1736090" y="2989580"/>
-            <a:ext cx="874395" cy="469265"/>
-          </a:xfrm>
-          <a:prstGeom prst="rect">
-            <a:avLst/>
-          </a:prstGeom>
-          <a:solidFill>
-            <a:schemeClr val="bg1"/>
-          </a:solidFill>
-        </p:spPr>
-        <p:txBody>
-          <a:bodyPr wrap="square" rtlCol="0">
-            <a:spAutoFit/>
-          </a:bodyPr>
-          <a:lstStyle/>
-          <a:p>
-            <a:pPr marL="0" marR="0" lvl="0" indent="0" algn="ctr" defTabSz="914400" rtl="0" eaLnBrk="1" fontAlgn="auto" latinLnBrk="0" hangingPunct="1">
-              <a:lnSpc>
-                <a:spcPct val="100000"/>
-              </a:lnSpc>
-              <a:spcBef>
-                <a:spcPts val="0"/>
-              </a:spcBef>
-              <a:spcAft>
-                <a:spcPts val="0"/>
-              </a:spcAft>
-              <a:buClrTx/>
-              <a:buSzTx/>
-              <a:buFontTx/>
-              <a:buNone/>
-              <a:defRPr/>
-            </a:pPr>
+              <a:t>存储价值</a:t>
+            </a:r>
             <a:r>
               <a:rPr kumimoji="0" lang="zh-CN" altLang="en-US" sz="1230" b="1" i="0" u="none" strike="noStrike" kern="1200" cap="none" spc="0" normalizeH="0" baseline="0" noProof="0" dirty="0">
                 <a:ln>
@@ -4249,24 +4217,7 @@
                 <a:ea typeface="微软雅黑" panose="020B0503020204020204" pitchFamily="34" charset="-122"/>
                 <a:cs typeface="+mn-cs"/>
               </a:rPr>
-              <a:t>存储利用</a:t>
-            </a:r>
-            <a:r>
-              <a:rPr kumimoji="0" lang="zh-CN" altLang="en-US" sz="1230" b="1" i="0" u="none" strike="noStrike" kern="1200" cap="none" spc="0" normalizeH="0" baseline="0" noProof="0" dirty="0">
-                <a:ln>
-                  <a:noFill/>
-                </a:ln>
-                <a:solidFill>
-                  <a:prstClr val="black"/>
-                </a:solidFill>
-                <a:effectLst/>
-                <a:uLnTx/>
-                <a:uFillTx/>
-                <a:latin typeface="微软雅黑" panose="020B0503020204020204" pitchFamily="34" charset="-122"/>
-                <a:ea typeface="微软雅黑" panose="020B0503020204020204" pitchFamily="34" charset="-122"/>
-                <a:cs typeface="+mn-cs"/>
-              </a:rPr>
-              <a:t>价值</a:t>
+              <a:t>评估</a:t>
             </a:r>
             <a:endParaRPr kumimoji="0" lang="zh-CN" altLang="en-US" sz="1230" b="1" i="0" u="none" strike="noStrike" kern="1200" cap="none" spc="0" normalizeH="0" baseline="0" noProof="0" dirty="0">
               <a:ln>

--- a/军民融合/ppt/2.pptx
+++ b/军民融合/ppt/2.pptx
@@ -4109,7 +4109,7 @@
                 <a:ea typeface="微软雅黑" panose="020B0503020204020204" pitchFamily="34" charset="-122"/>
                 <a:cs typeface="+mn-cs"/>
               </a:rPr>
-              <a:t>识别价值</a:t>
+              <a:t>数据价值</a:t>
             </a:r>
             <a:r>
               <a:rPr kumimoji="0" lang="zh-CN" altLang="en-US" sz="1230" b="1" i="0" u="none" strike="noStrike" kern="1200" cap="none" spc="0" normalizeH="0" baseline="0" noProof="0" dirty="0">
@@ -5800,7 +5800,7 @@
                 <a:cs typeface="Times New Roman" panose="02020603050405020304" pitchFamily="18" charset="0"/>
                 <a:sym typeface="+mn-ea"/>
               </a:rPr>
-              <a:t>事件窗口驱动的频谱数据</a:t>
+              <a:t>事件驱动的频谱数据</a:t>
             </a:r>
             <a:endParaRPr lang="zh-CN" altLang="en-US" sz="1300" b="1" noProof="0" dirty="0">
               <a:ln>
